--- a/assets/PashuSetu-SIH-Pitch.pptx
+++ b/assets/PashuSetu-SIH-Pitch.pptx
@@ -7661,7 +7661,7 @@
               </a:defRPr>
             </a:pPr>
             <a:r>
-              <a:t>Partner with one Pune dairy network + district veterinary office. Measure time from first signal to field verification.</a:t>
+              <a:t>Partner with one Raigad dairy network + district veterinary office. Measure time from first signal to field verification.</a:t>
             </a:r>
           </a:p>
         </p:txBody>
